--- a/site/clases/parte-1-machine-learning-clasico/077-svm-lineal/clase-077-svm-lineal-presentacion.pptx
+++ b/site/clases/parte-1-machine-learning-clasico/077-svm-lineal/clase-077-svm-lineal-presentacion.pptx
@@ -3272,7 +3272,7 @@
                 </a:solidFill>
                 <a:latin typeface="Segoe UI"/>
               </a:rPr>
-              <a:t>Parte: 1 — Machine Learning Clásico · Fuente: Géron, cap. 5.  Duración estimada: 60 min.</a:t>
+              <a:t>Parte: 1 — Machine Learning Clásico · Fuente: Géron, cap. 5.  Duración estimada: 60 min. · Nivel: Intermedio</a:t>
             </a:r>
           </a:p>
         </p:txBody>
@@ -3581,7 +3581,7 @@
                 </a:solidFill>
                 <a:latin typeface="Segoe UI"/>
               </a:rPr>
-              <a:t>Parte: 1 — Machine Learning Clásico · Fuente: Géron, cap. 5.  Duración estimada: 60 min.</a:t>
+              <a:t>Parte: 1 — Machine Learning Clásico · Fuente: Géron, cap. 5.  Duración estimada: 60 min. · Nivel: Intermedio</a:t>
             </a:r>
           </a:p>
         </p:txBody>
@@ -4845,7 +4845,7 @@
                 </a:solidFill>
                 <a:latin typeface="Segoe UI"/>
               </a:rPr>
-              <a:t>Primer bloque ejecutable del notebook.</a:t>
+              <a:t>Nos quedamos con dos features (petal length, petal width) para poder visualizar la frontera en 2D, y convertimos el problema a binario.</a:t>
             </a:r>
           </a:p>
         </p:txBody>
@@ -4932,7 +4932,330 @@
                 </a:solidFill>
                 <a:latin typeface="Courier New"/>
               </a:rPr>
-              <a:t># Imports y configuración inicial</a:t>
+              <a:t>import numpy as np</a:t>
+            </a:r>
+          </a:p>
+          <a:p>
+            <a:pPr>
+              <a:defRPr sz="1200" b="0">
+                <a:solidFill>
+                  <a:srgbClr val="F8FAFC"/>
+                </a:solidFill>
+                <a:latin typeface="Courier New"/>
+              </a:defRPr>
+            </a:pPr>
+            <a:r>
+              <a:rPr sz="1200" b="0">
+                <a:solidFill>
+                  <a:srgbClr val="F8FAFC"/>
+                </a:solidFill>
+                <a:latin typeface="Courier New"/>
+              </a:rPr>
+              <a:t>import matplotlib.pyplot as plt</a:t>
+            </a:r>
+          </a:p>
+          <a:p>
+            <a:pPr>
+              <a:defRPr sz="1200" b="0">
+                <a:solidFill>
+                  <a:srgbClr val="F8FAFC"/>
+                </a:solidFill>
+                <a:latin typeface="Courier New"/>
+              </a:defRPr>
+            </a:pPr>
+            <a:r>
+              <a:rPr sz="1200" b="0">
+                <a:solidFill>
+                  <a:srgbClr val="F8FAFC"/>
+                </a:solidFill>
+                <a:latin typeface="Courier New"/>
+              </a:rPr>
+              <a:t>from sklearn.datasets import load_iris</a:t>
+            </a:r>
+          </a:p>
+          <a:p>
+            <a:pPr>
+              <a:defRPr sz="1200" b="0">
+                <a:solidFill>
+                  <a:srgbClr val="F8FAFC"/>
+                </a:solidFill>
+                <a:latin typeface="Courier New"/>
+              </a:defRPr>
+            </a:pPr>
+            <a:r>
+              <a:rPr sz="1200" b="0">
+                <a:solidFill>
+                  <a:srgbClr val="F8FAFC"/>
+                </a:solidFill>
+                <a:latin typeface="Courier New"/>
+              </a:rPr>
+              <a:t>from sklearn.preprocessing import StandardScaler</a:t>
+            </a:r>
+          </a:p>
+          <a:p>
+            <a:pPr>
+              <a:defRPr sz="1200" b="0">
+                <a:solidFill>
+                  <a:srgbClr val="F8FAFC"/>
+                </a:solidFill>
+                <a:latin typeface="Courier New"/>
+              </a:defRPr>
+            </a:pPr>
+            <a:r>
+              <a:rPr sz="1200" b="0">
+                <a:solidFill>
+                  <a:srgbClr val="F8FAFC"/>
+                </a:solidFill>
+                <a:latin typeface="Courier New"/>
+              </a:rPr>
+              <a:t>from sklearn.svm import LinearSVC, SVC</a:t>
+            </a:r>
+          </a:p>
+          <a:p>
+            <a:pPr>
+              <a:defRPr sz="1200" b="0">
+                <a:solidFill>
+                  <a:srgbClr val="F8FAFC"/>
+                </a:solidFill>
+                <a:latin typeface="Courier New"/>
+              </a:defRPr>
+            </a:pPr>
+            <a:r>
+              <a:rPr sz="1200" b="0">
+                <a:solidFill>
+                  <a:srgbClr val="F8FAFC"/>
+                </a:solidFill>
+                <a:latin typeface="Courier New"/>
+              </a:rPr>
+              <a:t>from sklearn.pipeline import make_pipeline</a:t>
+            </a:r>
+          </a:p>
+          <a:p>
+            <a:pPr>
+              <a:defRPr sz="1200" b="0">
+                <a:solidFill>
+                  <a:srgbClr val="F8FAFC"/>
+                </a:solidFill>
+                <a:latin typeface="Courier New"/>
+              </a:defRPr>
+            </a:pPr>
+            <a:r>
+              <a:rPr sz="1200" b="0">
+                <a:solidFill>
+                  <a:srgbClr val="F8FAFC"/>
+                </a:solidFill>
+                <a:latin typeface="Courier New"/>
+              </a:rPr>
+              <a:t>from sklearn.model_selection import train_test_split</a:t>
+            </a:r>
+          </a:p>
+          <a:p>
+            <a:pPr>
+              <a:defRPr sz="1200" b="0">
+                <a:solidFill>
+                  <a:srgbClr val="F8FAFC"/>
+                </a:solidFill>
+                <a:latin typeface="Courier New"/>
+              </a:defRPr>
+            </a:pPr>
+            <a:r>
+              <a:rPr sz="1200" b="0">
+                <a:solidFill>
+                  <a:srgbClr val="F8FAFC"/>
+                </a:solidFill>
+                <a:latin typeface="Courier New"/>
+              </a:rPr>
+              <a:t>from sklearn.metrics import accuracy_score</a:t>
+            </a:r>
+          </a:p>
+          <a:p>
+            <a:pPr>
+              <a:defRPr sz="1200" b="0">
+                <a:solidFill>
+                  <a:srgbClr val="F8FAFC"/>
+                </a:solidFill>
+                <a:latin typeface="Courier New"/>
+              </a:defRPr>
+            </a:pPr>
+            <a:r>
+              <a:rPr sz="1200" b="0">
+                <a:solidFill>
+                  <a:srgbClr val="F8FAFC"/>
+                </a:solidFill>
+                <a:latin typeface="Courier New"/>
+              </a:rPr>
+              <a:t> </a:t>
+            </a:r>
+          </a:p>
+          <a:p>
+            <a:pPr>
+              <a:defRPr sz="1200" b="0">
+                <a:solidFill>
+                  <a:srgbClr val="F8FAFC"/>
+                </a:solidFill>
+                <a:latin typeface="Courier New"/>
+              </a:defRPr>
+            </a:pPr>
+            <a:r>
+              <a:rPr sz="1200" b="0">
+                <a:solidFill>
+                  <a:srgbClr val="F8FAFC"/>
+                </a:solidFill>
+                <a:latin typeface="Courier New"/>
+              </a:rPr>
+              <a:t>RND = 42</a:t>
+            </a:r>
+          </a:p>
+          <a:p>
+            <a:pPr>
+              <a:defRPr sz="1200" b="0">
+                <a:solidFill>
+                  <a:srgbClr val="F8FAFC"/>
+                </a:solidFill>
+                <a:latin typeface="Courier New"/>
+              </a:defRPr>
+            </a:pPr>
+            <a:r>
+              <a:rPr sz="1200" b="0">
+                <a:solidFill>
+                  <a:srgbClr val="F8FAFC"/>
+                </a:solidFill>
+                <a:latin typeface="Courier New"/>
+              </a:rPr>
+              <a:t>np.random.seed(RND)</a:t>
+            </a:r>
+          </a:p>
+          <a:p>
+            <a:pPr>
+              <a:defRPr sz="1200" b="0">
+                <a:solidFill>
+                  <a:srgbClr val="F8FAFC"/>
+                </a:solidFill>
+                <a:latin typeface="Courier New"/>
+              </a:defRPr>
+            </a:pPr>
+            <a:r>
+              <a:rPr sz="1200" b="0">
+                <a:solidFill>
+                  <a:srgbClr val="F8FAFC"/>
+                </a:solidFill>
+                <a:latin typeface="Courier New"/>
+              </a:rPr>
+              <a:t>iris = load_iris()</a:t>
+            </a:r>
+          </a:p>
+          <a:p>
+            <a:pPr>
+              <a:defRPr sz="1200" b="0">
+                <a:solidFill>
+                  <a:srgbClr val="F8FAFC"/>
+                </a:solidFill>
+                <a:latin typeface="Courier New"/>
+              </a:defRPr>
+            </a:pPr>
+            <a:r>
+              <a:rPr sz="1200" b="0">
+                <a:solidFill>
+                  <a:srgbClr val="F8FAFC"/>
+                </a:solidFill>
+                <a:latin typeface="Courier New"/>
+              </a:rPr>
+              <a:t>X = iris.data[:, 2:4]            # petalo: largo y ancho</a:t>
+            </a:r>
+          </a:p>
+          <a:p>
+            <a:pPr>
+              <a:defRPr sz="1200" b="0">
+                <a:solidFill>
+                  <a:srgbClr val="F8FAFC"/>
+                </a:solidFill>
+                <a:latin typeface="Courier New"/>
+              </a:defRPr>
+            </a:pPr>
+            <a:r>
+              <a:rPr sz="1200" b="0">
+                <a:solidFill>
+                  <a:srgbClr val="F8FAFC"/>
+                </a:solidFill>
+                <a:latin typeface="Courier New"/>
+              </a:rPr>
+              <a:t>y = (iris.target == 2).astype(int)   # 1 = Virginica, 0 = resto</a:t>
+            </a:r>
+          </a:p>
+          <a:p>
+            <a:pPr>
+              <a:defRPr sz="1200" b="0">
+                <a:solidFill>
+                  <a:srgbClr val="F8FAFC"/>
+                </a:solidFill>
+                <a:latin typeface="Courier New"/>
+              </a:defRPr>
+            </a:pPr>
+            <a:r>
+              <a:rPr sz="1200" b="0">
+                <a:solidFill>
+                  <a:srgbClr val="F8FAFC"/>
+                </a:solidFill>
+                <a:latin typeface="Courier New"/>
+              </a:rPr>
+              <a:t>X_train, X_test, y_train, y_test = train_test_split(</a:t>
+            </a:r>
+          </a:p>
+          <a:p>
+            <a:pPr>
+              <a:defRPr sz="1200" b="0">
+                <a:solidFill>
+                  <a:srgbClr val="F8FAFC"/>
+                </a:solidFill>
+                <a:latin typeface="Courier New"/>
+              </a:defRPr>
+            </a:pPr>
+            <a:r>
+              <a:rPr sz="1200" b="0">
+                <a:solidFill>
+                  <a:srgbClr val="F8FAFC"/>
+                </a:solidFill>
+                <a:latin typeface="Courier New"/>
+              </a:rPr>
+              <a:t>    X, y, test_size=0.2, random_state=RND, stratify=y)</a:t>
+            </a:r>
+          </a:p>
+          <a:p>
+            <a:pPr>
+              <a:defRPr sz="1200" b="0">
+                <a:solidFill>
+                  <a:srgbClr val="F8FAFC"/>
+                </a:solidFill>
+                <a:latin typeface="Courier New"/>
+              </a:defRPr>
+            </a:pPr>
+            <a:r>
+              <a:rPr sz="1200" b="0">
+                <a:solidFill>
+                  <a:srgbClr val="F8FAFC"/>
+                </a:solidFill>
+                <a:latin typeface="Courier New"/>
+              </a:rPr>
+              <a:t>print("X:", X.shape, "| Virginica (positivos):", int(y.sum()))</a:t>
+            </a:r>
+          </a:p>
+          <a:p>
+            <a:pPr>
+              <a:defRPr sz="1200" b="0">
+                <a:solidFill>
+                  <a:srgbClr val="F8FAFC"/>
+                </a:solidFill>
+                <a:latin typeface="Courier New"/>
+              </a:defRPr>
+            </a:pPr>
+            <a:r>
+              <a:rPr sz="1200" b="0">
+                <a:solidFill>
+                  <a:srgbClr val="F8FAFC"/>
+                </a:solidFill>
+                <a:latin typeface="Courier New"/>
+              </a:rPr>
+              <a:t>print("train:", X_train.shape[0], "| test:", X_test.shape[0])</a:t>
             </a:r>
           </a:p>
         </p:txBody>
